--- a/GenAI/wk4-embedding-vectorDB-SemanticSearch/RAG-1-Intro-v2.pptx
+++ b/GenAI/wk4-embedding-vectorDB-SemanticSearch/RAG-1-Intro-v2.pptx
@@ -227,7 +227,7 @@
           <a:p>
             <a:fld id="{7BAEECA8-D063-486F-AE31-5020270C1449}" type="datetimeFigureOut">
               <a:rPr lang="en-US" smtClean="0"/>
-              <a:t>5/21/2026</a:t>
+              <a:t>7/21/2026</a:t>
             </a:fld>
             <a:endParaRPr lang="en-US"/>
           </a:p>
@@ -2152,7 +2152,7 @@
           <a:p>
             <a:fld id="{CB233BD1-3BA8-448D-9D08-7846095EA517}" type="datetimeFigureOut">
               <a:rPr lang="en-US" smtClean="0"/>
-              <a:t>5/21/2026</a:t>
+              <a:t>7/21/2026</a:t>
             </a:fld>
             <a:endParaRPr lang="en-US"/>
           </a:p>
@@ -2566,7 +2566,7 @@
           <a:p>
             <a:fld id="{6383FAE1-13DE-4511-8C1B-C8AFB720664C}" type="datetimeFigureOut">
               <a:rPr lang="en-US" smtClean="0"/>
-              <a:t>5/21/2026</a:t>
+              <a:t>7/21/2026</a:t>
             </a:fld>
             <a:endParaRPr lang="en-US"/>
           </a:p>
@@ -2764,7 +2764,7 @@
           <a:p>
             <a:fld id="{6383FAE1-13DE-4511-8C1B-C8AFB720664C}" type="datetimeFigureOut">
               <a:rPr lang="en-US" smtClean="0"/>
-              <a:t>5/21/2026</a:t>
+              <a:t>7/21/2026</a:t>
             </a:fld>
             <a:endParaRPr lang="en-US"/>
           </a:p>
@@ -2972,7 +2972,7 @@
           <a:p>
             <a:fld id="{6383FAE1-13DE-4511-8C1B-C8AFB720664C}" type="datetimeFigureOut">
               <a:rPr lang="en-US" smtClean="0"/>
-              <a:t>5/21/2026</a:t>
+              <a:t>7/21/2026</a:t>
             </a:fld>
             <a:endParaRPr lang="en-US"/>
           </a:p>
@@ -3170,7 +3170,7 @@
           <a:p>
             <a:fld id="{6383FAE1-13DE-4511-8C1B-C8AFB720664C}" type="datetimeFigureOut">
               <a:rPr lang="en-US" smtClean="0"/>
-              <a:t>5/21/2026</a:t>
+              <a:t>7/21/2026</a:t>
             </a:fld>
             <a:endParaRPr lang="en-US"/>
           </a:p>
@@ -3445,7 +3445,7 @@
           <a:p>
             <a:fld id="{6383FAE1-13DE-4511-8C1B-C8AFB720664C}" type="datetimeFigureOut">
               <a:rPr lang="en-US" smtClean="0"/>
-              <a:t>5/21/2026</a:t>
+              <a:t>7/21/2026</a:t>
             </a:fld>
             <a:endParaRPr lang="en-US"/>
           </a:p>
@@ -3710,7 +3710,7 @@
           <a:p>
             <a:fld id="{6383FAE1-13DE-4511-8C1B-C8AFB720664C}" type="datetimeFigureOut">
               <a:rPr lang="en-US" smtClean="0"/>
-              <a:t>5/21/2026</a:t>
+              <a:t>7/21/2026</a:t>
             </a:fld>
             <a:endParaRPr lang="en-US"/>
           </a:p>
@@ -4122,7 +4122,7 @@
           <a:p>
             <a:fld id="{6383FAE1-13DE-4511-8C1B-C8AFB720664C}" type="datetimeFigureOut">
               <a:rPr lang="en-US" smtClean="0"/>
-              <a:t>5/21/2026</a:t>
+              <a:t>7/21/2026</a:t>
             </a:fld>
             <a:endParaRPr lang="en-US"/>
           </a:p>
@@ -4263,7 +4263,7 @@
           <a:p>
             <a:fld id="{6383FAE1-13DE-4511-8C1B-C8AFB720664C}" type="datetimeFigureOut">
               <a:rPr lang="en-US" smtClean="0"/>
-              <a:t>5/21/2026</a:t>
+              <a:t>7/21/2026</a:t>
             </a:fld>
             <a:endParaRPr lang="en-US"/>
           </a:p>
@@ -4376,7 +4376,7 @@
           <a:p>
             <a:fld id="{6383FAE1-13DE-4511-8C1B-C8AFB720664C}" type="datetimeFigureOut">
               <a:rPr lang="en-US" smtClean="0"/>
-              <a:t>5/21/2026</a:t>
+              <a:t>7/21/2026</a:t>
             </a:fld>
             <a:endParaRPr lang="en-US"/>
           </a:p>
@@ -4687,7 +4687,7 @@
           <a:p>
             <a:fld id="{6383FAE1-13DE-4511-8C1B-C8AFB720664C}" type="datetimeFigureOut">
               <a:rPr lang="en-US" smtClean="0"/>
-              <a:t>5/21/2026</a:t>
+              <a:t>7/21/2026</a:t>
             </a:fld>
             <a:endParaRPr lang="en-US"/>
           </a:p>
@@ -4978,7 +4978,7 @@
           <a:p>
             <a:fld id="{6383FAE1-13DE-4511-8C1B-C8AFB720664C}" type="datetimeFigureOut">
               <a:rPr lang="en-US" smtClean="0"/>
-              <a:t>5/21/2026</a:t>
+              <a:t>7/21/2026</a:t>
             </a:fld>
             <a:endParaRPr lang="en-US"/>
           </a:p>
@@ -5222,7 +5222,7 @@
           <a:p>
             <a:fld id="{6383FAE1-13DE-4511-8C1B-C8AFB720664C}" type="datetimeFigureOut">
               <a:rPr lang="en-US" smtClean="0"/>
-              <a:t>5/21/2026</a:t>
+              <a:t>7/21/2026</a:t>
             </a:fld>
             <a:endParaRPr lang="en-US"/>
           </a:p>
@@ -5934,8 +5934,8 @@
         </p:nvSpPr>
         <p:spPr>
           <a:xfrm>
-            <a:off x="2396744" y="2091912"/>
-            <a:ext cx="9509760" cy="3211135"/>
+            <a:off x="2196288" y="2091912"/>
+            <a:ext cx="9856520" cy="3211135"/>
           </a:xfrm>
           <a:prstGeom prst="rect">
             <a:avLst/>
@@ -6084,7 +6084,7 @@
                   </a:schemeClr>
                 </a:solidFill>
               </a:rPr>
-              <a:t>1) Founders of Loxford Academy are living in Moscow</a:t>
+              <a:t>1) Founders of Loxford Academy are living in Moscow. It is cold there.</a:t>
             </a:r>
           </a:p>
           <a:p>
@@ -6097,29 +6097,7 @@
                   </a:schemeClr>
                 </a:solidFill>
               </a:rPr>
-              <a:t>          2) Ms. Lomax and Mr. Thomas founded </a:t>
-            </a:r>
-            <a:r>
-              <a:rPr lang="en-US" sz="2400" b="1" dirty="0" err="1">
-                <a:solidFill>
-                  <a:schemeClr val="accent6">
-                    <a:lumMod val="60000"/>
-                    <a:lumOff val="40000"/>
-                  </a:schemeClr>
-                </a:solidFill>
-              </a:rPr>
-              <a:t>Loxford</a:t>
-            </a:r>
-            <a:r>
-              <a:rPr lang="en-US" sz="2400" b="1" dirty="0">
-                <a:solidFill>
-                  <a:schemeClr val="accent6">
-                    <a:lumMod val="60000"/>
-                    <a:lumOff val="40000"/>
-                  </a:schemeClr>
-                </a:solidFill>
-              </a:rPr>
-              <a:t> Academy in 2018 </a:t>
+              <a:t>          2) Ms. Lomax and Mr. Thomas created this academy in 2018. </a:t>
             </a:r>
           </a:p>
           <a:p>
@@ -7823,7 +7801,7 @@
         <p:spPr>
           <a:xfrm>
             <a:off x="320545" y="5825566"/>
-            <a:ext cx="11871455" cy="461665"/>
+            <a:ext cx="9163791" cy="461665"/>
           </a:xfrm>
           <a:prstGeom prst="rect">
             <a:avLst/>
@@ -7856,7 +7834,7 @@
                   </a:schemeClr>
                 </a:solidFill>
               </a:rPr>
-              <a:t>Ms. Lomax and Mr. Thomas founded this academy. They both live in Moscow</a:t>
+              <a:t>Ms. Lomax and Mr. Thomas founded Loxford Academy. </a:t>
             </a:r>
           </a:p>
         </p:txBody>
@@ -8391,7 +8369,7 @@
         </p:nvSpPr>
         <p:spPr>
           <a:xfrm>
-            <a:off x="265176" y="565142"/>
+            <a:off x="90424" y="1166842"/>
             <a:ext cx="9582912" cy="4524315"/>
           </a:xfrm>
           <a:prstGeom prst="rect">
@@ -8664,8 +8642,8 @@
         </p:nvSpPr>
         <p:spPr>
           <a:xfrm>
-            <a:off x="148336" y="354552"/>
-            <a:ext cx="6417056" cy="3046988"/>
+            <a:off x="121394" y="1205736"/>
+            <a:ext cx="6417056" cy="3416320"/>
           </a:xfrm>
           <a:prstGeom prst="rect">
             <a:avLst/>
@@ -8743,10 +8721,16 @@
                   </a:schemeClr>
                 </a:solidFill>
               </a:rPr>
-              <a:t> where a language model (like GPT) first </a:t>
-            </a:r>
-            <a:r>
-              <a:rPr lang="en-US" sz="2400" b="1" dirty="0">
+              <a:t> where a language model (like GPT) </a:t>
+            </a:r>
+          </a:p>
+          <a:p>
+            <a:pPr marL="457200" indent="-457200">
+              <a:buFont typeface="+mj-lt"/>
+              <a:buAutoNum type="arabicPeriod"/>
+            </a:pPr>
+            <a:r>
+              <a:rPr lang="en-US" sz="2400" dirty="0">
                 <a:solidFill>
                   <a:schemeClr val="accent6">
                     <a:lumMod val="60000"/>
@@ -8754,10 +8738,10 @@
                   </a:schemeClr>
                 </a:solidFill>
               </a:rPr>
-              <a:t>retrieves relevant information from an external source</a:t>
-            </a:r>
-            <a:r>
-              <a:rPr lang="en-US" sz="2400" dirty="0">
+              <a:t>first </a:t>
+            </a:r>
+            <a:r>
+              <a:rPr lang="en-US" sz="2400" b="1" dirty="0">
                 <a:solidFill>
                   <a:schemeClr val="accent6">
                     <a:lumMod val="60000"/>
@@ -8765,7 +8749,35 @@
                   </a:schemeClr>
                 </a:solidFill>
               </a:rPr>
-              <a:t>, and then </a:t>
+              <a:t>retrieves relevant information from an external source</a:t>
+            </a:r>
+            <a:r>
+              <a:rPr lang="en-US" sz="2400" dirty="0">
+                <a:solidFill>
+                  <a:schemeClr val="accent6">
+                    <a:lumMod val="60000"/>
+                    <a:lumOff val="40000"/>
+                  </a:schemeClr>
+                </a:solidFill>
+              </a:rPr>
+              <a:t>, and </a:t>
+            </a:r>
+          </a:p>
+          <a:p>
+            <a:pPr marL="457200" indent="-457200">
+              <a:buFont typeface="+mj-lt"/>
+              <a:buAutoNum type="arabicPeriod"/>
+            </a:pPr>
+            <a:r>
+              <a:rPr lang="en-US" sz="2400" dirty="0">
+                <a:solidFill>
+                  <a:schemeClr val="accent6">
+                    <a:lumMod val="60000"/>
+                    <a:lumOff val="40000"/>
+                  </a:schemeClr>
+                </a:solidFill>
+              </a:rPr>
+              <a:t>then </a:t>
             </a:r>
             <a:r>
               <a:rPr lang="en-US" sz="2400" b="1" dirty="0">
@@ -9534,7 +9546,7 @@
         </p:nvSpPr>
         <p:spPr>
           <a:xfrm>
-            <a:off x="148336" y="107664"/>
+            <a:off x="167815" y="1363671"/>
             <a:ext cx="6636512" cy="1569660"/>
           </a:xfrm>
           <a:prstGeom prst="rect">
@@ -9920,7 +9932,7 @@
         <p:spPr>
           <a:xfrm>
             <a:off x="148336" y="80232"/>
-            <a:ext cx="8218424" cy="3046988"/>
+            <a:ext cx="8218424" cy="3416320"/>
           </a:xfrm>
           <a:prstGeom prst="rect">
             <a:avLst/>
@@ -9976,7 +9988,7 @@
                   </a:schemeClr>
                 </a:solidFill>
               </a:rPr>
-              <a:t>Search relevant documents and Extract useful information</a:t>
+              <a:t>RAG system would search relevant documents and extract useful information</a:t>
             </a:r>
           </a:p>
           <a:p>
@@ -11316,9 +11328,9 @@
             </a:r>
           </a:p>
           <a:p>
-            <a:pPr marL="342900" indent="-342900">
-              <a:buFont typeface="Arial" panose="020B0604020202020204" pitchFamily="34" charset="0"/>
-              <a:buChar char="•"/>
+            <a:pPr marL="457200" indent="-457200">
+              <a:buFont typeface="+mj-lt"/>
+              <a:buAutoNum type="alphaLcParenR"/>
             </a:pPr>
             <a:r>
               <a:rPr lang="en-US" sz="2000" dirty="0">
@@ -11333,9 +11345,9 @@
             </a:r>
           </a:p>
           <a:p>
-            <a:pPr marL="342900" indent="-342900">
-              <a:buFont typeface="Arial" panose="020B0604020202020204" pitchFamily="34" charset="0"/>
-              <a:buChar char="•"/>
+            <a:pPr marL="457200" indent="-457200">
+              <a:buFont typeface="+mj-lt"/>
+              <a:buAutoNum type="alphaLcParenR"/>
             </a:pPr>
             <a:r>
               <a:rPr lang="en-US" sz="2000" dirty="0">
@@ -11973,9 +11985,9 @@
             </a:r>
           </a:p>
           <a:p>
-            <a:pPr marL="342900" indent="-342900">
-              <a:buFont typeface="Arial" panose="020B0604020202020204" pitchFamily="34" charset="0"/>
-              <a:buChar char="•"/>
+            <a:pPr marL="457200" indent="-457200">
+              <a:buFont typeface="+mj-lt"/>
+              <a:buAutoNum type="alphaLcParenR"/>
             </a:pPr>
             <a:r>
               <a:rPr lang="en-US" sz="2000" dirty="0">
@@ -11990,9 +12002,9 @@
             </a:r>
           </a:p>
           <a:p>
-            <a:pPr marL="342900" indent="-342900">
-              <a:buFont typeface="Arial" panose="020B0604020202020204" pitchFamily="34" charset="0"/>
-              <a:buChar char="•"/>
+            <a:pPr marL="457200" indent="-457200">
+              <a:buFont typeface="+mj-lt"/>
+              <a:buAutoNum type="alphaLcParenR"/>
             </a:pPr>
             <a:r>
               <a:rPr lang="en-US" sz="2000" dirty="0">
